--- a/slides-pptx/06-Python_intro-dataContainers.pptx
+++ b/slides-pptx/06-Python_intro-dataContainers.pptx
@@ -727,73 +727,6 @@
     </pc:docChg>
   </pc:docChgLst>
   <pc:docChgLst>
-    <pc:chgData name="Frank Van Puyvelde" userId="ba4190df-4674-45fe-be59-1502c3515486" providerId="ADAL" clId="{2427602A-053C-4C5D-9F1D-9937C3B35445}"/>
-    <pc:docChg chg="custSel modSld">
-      <pc:chgData name="Frank Van Puyvelde" userId="ba4190df-4674-45fe-be59-1502c3515486" providerId="ADAL" clId="{2427602A-053C-4C5D-9F1D-9937C3B35445}" dt="2024-05-27T08:52:05.608" v="53" actId="20577"/>
-      <pc:docMkLst>
-        <pc:docMk/>
-      </pc:docMkLst>
-      <pc:sldChg chg="modSp mod">
-        <pc:chgData name="Frank Van Puyvelde" userId="ba4190df-4674-45fe-be59-1502c3515486" providerId="ADAL" clId="{2427602A-053C-4C5D-9F1D-9937C3B35445}" dt="2024-05-27T08:52:05.608" v="53" actId="20577"/>
-        <pc:sldMkLst>
-          <pc:docMk/>
-          <pc:sldMk cId="779977204" sldId="265"/>
-        </pc:sldMkLst>
-      </pc:sldChg>
-      <pc:sldChg chg="modSp mod modShow">
-        <pc:chgData name="Frank Van Puyvelde" userId="ba4190df-4674-45fe-be59-1502c3515486" providerId="ADAL" clId="{2427602A-053C-4C5D-9F1D-9937C3B35445}" dt="2024-05-27T08:48:07.568" v="9" actId="20577"/>
-        <pc:sldMkLst>
-          <pc:docMk/>
-          <pc:sldMk cId="3383233928" sldId="454"/>
-        </pc:sldMkLst>
-      </pc:sldChg>
-      <pc:sldChg chg="modSp mod">
-        <pc:chgData name="Frank Van Puyvelde" userId="ba4190df-4674-45fe-be59-1502c3515486" providerId="ADAL" clId="{2427602A-053C-4C5D-9F1D-9937C3B35445}" dt="2024-05-27T08:51:24.572" v="18" actId="27636"/>
-        <pc:sldMkLst>
-          <pc:docMk/>
-          <pc:sldMk cId="3803441011" sldId="457"/>
-        </pc:sldMkLst>
-      </pc:sldChg>
-    </pc:docChg>
-  </pc:docChgLst>
-  <pc:docChgLst>
-    <pc:chgData name="Frank Van Puyvelde" userId="ba4190df-4674-45fe-be59-1502c3515486" providerId="ADAL" clId="{37534DEC-33FC-4668-815A-66209A3D8D61}"/>
-    <pc:docChg chg="custSel addSld delSld modSld modSection">
-      <pc:chgData name="Frank Van Puyvelde" userId="ba4190df-4674-45fe-be59-1502c3515486" providerId="ADAL" clId="{37534DEC-33FC-4668-815A-66209A3D8D61}" dt="2023-08-30T06:56:08.083" v="74" actId="47"/>
-      <pc:docMkLst>
-        <pc:docMk/>
-      </pc:docMkLst>
-      <pc:sldChg chg="modSp new mod">
-        <pc:chgData name="Frank Van Puyvelde" userId="ba4190df-4674-45fe-be59-1502c3515486" providerId="ADAL" clId="{37534DEC-33FC-4668-815A-66209A3D8D61}" dt="2023-08-30T06:52:03.525" v="15" actId="27636"/>
-        <pc:sldMkLst>
-          <pc:docMk/>
-          <pc:sldMk cId="1738931001" sldId="479"/>
-        </pc:sldMkLst>
-      </pc:sldChg>
-      <pc:sldChg chg="modSp new mod">
-        <pc:chgData name="Frank Van Puyvelde" userId="ba4190df-4674-45fe-be59-1502c3515486" providerId="ADAL" clId="{37534DEC-33FC-4668-815A-66209A3D8D61}" dt="2023-08-30T06:54:41.702" v="72" actId="2711"/>
-        <pc:sldMkLst>
-          <pc:docMk/>
-          <pc:sldMk cId="362846726" sldId="480"/>
-        </pc:sldMkLst>
-      </pc:sldChg>
-      <pc:sldChg chg="new del">
-        <pc:chgData name="Frank Van Puyvelde" userId="ba4190df-4674-45fe-be59-1502c3515486" providerId="ADAL" clId="{37534DEC-33FC-4668-815A-66209A3D8D61}" dt="2023-08-30T06:56:08.083" v="74" actId="47"/>
-        <pc:sldMkLst>
-          <pc:docMk/>
-          <pc:sldMk cId="932201058" sldId="481"/>
-        </pc:sldMkLst>
-      </pc:sldChg>
-      <pc:sldChg chg="new del">
-        <pc:chgData name="Frank Van Puyvelde" userId="ba4190df-4674-45fe-be59-1502c3515486" providerId="ADAL" clId="{37534DEC-33FC-4668-815A-66209A3D8D61}" dt="2023-08-30T06:56:05.150" v="73" actId="47"/>
-        <pc:sldMkLst>
-          <pc:docMk/>
-          <pc:sldMk cId="2371913727" sldId="482"/>
-        </pc:sldMkLst>
-      </pc:sldChg>
-    </pc:docChg>
-  </pc:docChgLst>
-  <pc:docChgLst>
     <pc:chgData name="Frank Van Puyvelde" userId="ba4190df-4674-45fe-be59-1502c3515486" providerId="ADAL" clId="{EF22355B-D4A7-42DA-B205-F0FC9F1CFC14}"/>
     <pc:docChg chg="custSel addSld delSld modSld sldOrd modSection">
       <pc:chgData name="Frank Van Puyvelde" userId="ba4190df-4674-45fe-be59-1502c3515486" providerId="ADAL" clId="{EF22355B-D4A7-42DA-B205-F0FC9F1CFC14}" dt="2023-09-13T13:05:28.652" v="200" actId="2711"/>
@@ -838,6 +771,329 @@
     </pc:docChg>
   </pc:docChgLst>
   <pc:docChgLst>
+    <pc:chgData name="Frank Van Puyvelde" userId="ba4190df-4674-45fe-be59-1502c3515486" providerId="ADAL" clId="{AA9463B4-8017-459B-8EBC-B2A62FCBE215}"/>
+    <pc:docChg chg="custSel addSld modSld modSection">
+      <pc:chgData name="Frank Van Puyvelde" userId="ba4190df-4674-45fe-be59-1502c3515486" providerId="ADAL" clId="{AA9463B4-8017-459B-8EBC-B2A62FCBE215}" dt="2023-02-09T16:17:23.857" v="36" actId="20577"/>
+      <pc:docMkLst>
+        <pc:docMk/>
+      </pc:docMkLst>
+      <pc:sldChg chg="modSp">
+        <pc:chgData name="Frank Van Puyvelde" userId="ba4190df-4674-45fe-be59-1502c3515486" providerId="ADAL" clId="{AA9463B4-8017-459B-8EBC-B2A62FCBE215}" dt="2023-02-09T09:14:22.384" v="0"/>
+        <pc:sldMkLst>
+          <pc:docMk/>
+          <pc:sldMk cId="2319990141" sldId="287"/>
+        </pc:sldMkLst>
+      </pc:sldChg>
+      <pc:sldChg chg="modSp new mod">
+        <pc:chgData name="Frank Van Puyvelde" userId="ba4190df-4674-45fe-be59-1502c3515486" providerId="ADAL" clId="{AA9463B4-8017-459B-8EBC-B2A62FCBE215}" dt="2023-02-09T16:17:23.857" v="36" actId="20577"/>
+        <pc:sldMkLst>
+          <pc:docMk/>
+          <pc:sldMk cId="2119275025" sldId="478"/>
+        </pc:sldMkLst>
+      </pc:sldChg>
+    </pc:docChg>
+  </pc:docChgLst>
+  <pc:docChgLst>
+    <pc:chgData name="Frank Van Puyvelde" userId="ba4190df-4674-45fe-be59-1502c3515486" providerId="ADAL" clId="{37534DEC-33FC-4668-815A-66209A3D8D61}"/>
+    <pc:docChg chg="custSel addSld delSld modSld modSection">
+      <pc:chgData name="Frank Van Puyvelde" userId="ba4190df-4674-45fe-be59-1502c3515486" providerId="ADAL" clId="{37534DEC-33FC-4668-815A-66209A3D8D61}" dt="2023-08-30T06:56:08.083" v="74" actId="47"/>
+      <pc:docMkLst>
+        <pc:docMk/>
+      </pc:docMkLst>
+      <pc:sldChg chg="modSp new mod">
+        <pc:chgData name="Frank Van Puyvelde" userId="ba4190df-4674-45fe-be59-1502c3515486" providerId="ADAL" clId="{37534DEC-33FC-4668-815A-66209A3D8D61}" dt="2023-08-30T06:52:03.525" v="15" actId="27636"/>
+        <pc:sldMkLst>
+          <pc:docMk/>
+          <pc:sldMk cId="1738931001" sldId="479"/>
+        </pc:sldMkLst>
+      </pc:sldChg>
+      <pc:sldChg chg="modSp new mod">
+        <pc:chgData name="Frank Van Puyvelde" userId="ba4190df-4674-45fe-be59-1502c3515486" providerId="ADAL" clId="{37534DEC-33FC-4668-815A-66209A3D8D61}" dt="2023-08-30T06:54:41.702" v="72" actId="2711"/>
+        <pc:sldMkLst>
+          <pc:docMk/>
+          <pc:sldMk cId="362846726" sldId="480"/>
+        </pc:sldMkLst>
+      </pc:sldChg>
+      <pc:sldChg chg="new del">
+        <pc:chgData name="Frank Van Puyvelde" userId="ba4190df-4674-45fe-be59-1502c3515486" providerId="ADAL" clId="{37534DEC-33FC-4668-815A-66209A3D8D61}" dt="2023-08-30T06:56:08.083" v="74" actId="47"/>
+        <pc:sldMkLst>
+          <pc:docMk/>
+          <pc:sldMk cId="932201058" sldId="481"/>
+        </pc:sldMkLst>
+      </pc:sldChg>
+      <pc:sldChg chg="new del">
+        <pc:chgData name="Frank Van Puyvelde" userId="ba4190df-4674-45fe-be59-1502c3515486" providerId="ADAL" clId="{37534DEC-33FC-4668-815A-66209A3D8D61}" dt="2023-08-30T06:56:05.150" v="73" actId="47"/>
+        <pc:sldMkLst>
+          <pc:docMk/>
+          <pc:sldMk cId="2371913727" sldId="482"/>
+        </pc:sldMkLst>
+      </pc:sldChg>
+    </pc:docChg>
+  </pc:docChgLst>
+  <pc:docChgLst>
+    <pc:chgData name="Frank Van Puyvelde" userId="ba4190df-4674-45fe-be59-1502c3515486" providerId="ADAL" clId="{3110D798-6ACE-415E-A5DC-2A40D2393998}"/>
+    <pc:docChg chg="undo custSel addSld delSld modSld modSection">
+      <pc:chgData name="Frank Van Puyvelde" userId="ba4190df-4674-45fe-be59-1502c3515486" providerId="ADAL" clId="{3110D798-6ACE-415E-A5DC-2A40D2393998}" dt="2022-11-12T10:27:28.525" v="1559" actId="403"/>
+      <pc:docMkLst>
+        <pc:docMk/>
+      </pc:docMkLst>
+      <pc:sldChg chg="modSp mod">
+        <pc:chgData name="Frank Van Puyvelde" userId="ba4190df-4674-45fe-be59-1502c3515486" providerId="ADAL" clId="{3110D798-6ACE-415E-A5DC-2A40D2393998}" dt="2022-11-04T07:22:33.307" v="169" actId="20577"/>
+        <pc:sldMkLst>
+          <pc:docMk/>
+          <pc:sldMk cId="2072749382" sldId="264"/>
+        </pc:sldMkLst>
+      </pc:sldChg>
+      <pc:sldChg chg="modSp mod">
+        <pc:chgData name="Frank Van Puyvelde" userId="ba4190df-4674-45fe-be59-1502c3515486" providerId="ADAL" clId="{3110D798-6ACE-415E-A5DC-2A40D2393998}" dt="2022-11-04T07:47:45.712" v="446" actId="5793"/>
+        <pc:sldMkLst>
+          <pc:docMk/>
+          <pc:sldMk cId="779977204" sldId="265"/>
+        </pc:sldMkLst>
+      </pc:sldChg>
+      <pc:sldChg chg="modSp mod">
+        <pc:chgData name="Frank Van Puyvelde" userId="ba4190df-4674-45fe-be59-1502c3515486" providerId="ADAL" clId="{3110D798-6ACE-415E-A5DC-2A40D2393998}" dt="2022-11-04T08:48:44.874" v="870" actId="20577"/>
+        <pc:sldMkLst>
+          <pc:docMk/>
+          <pc:sldMk cId="1685400709" sldId="266"/>
+        </pc:sldMkLst>
+      </pc:sldChg>
+      <pc:sldChg chg="modSp mod">
+        <pc:chgData name="Frank Van Puyvelde" userId="ba4190df-4674-45fe-be59-1502c3515486" providerId="ADAL" clId="{3110D798-6ACE-415E-A5DC-2A40D2393998}" dt="2022-11-12T10:27:28.525" v="1559" actId="403"/>
+        <pc:sldMkLst>
+          <pc:docMk/>
+          <pc:sldMk cId="2423346693" sldId="267"/>
+        </pc:sldMkLst>
+      </pc:sldChg>
+      <pc:sldChg chg="modSp mod">
+        <pc:chgData name="Frank Van Puyvelde" userId="ba4190df-4674-45fe-be59-1502c3515486" providerId="ADAL" clId="{3110D798-6ACE-415E-A5DC-2A40D2393998}" dt="2022-11-03T15:07:36.652" v="0" actId="113"/>
+        <pc:sldMkLst>
+          <pc:docMk/>
+          <pc:sldMk cId="1364474533" sldId="288"/>
+        </pc:sldMkLst>
+      </pc:sldChg>
+      <pc:sldChg chg="modSp mod">
+        <pc:chgData name="Frank Van Puyvelde" userId="ba4190df-4674-45fe-be59-1502c3515486" providerId="ADAL" clId="{3110D798-6ACE-415E-A5DC-2A40D2393998}" dt="2022-11-03T15:24:28.709" v="25" actId="20577"/>
+        <pc:sldMkLst>
+          <pc:docMk/>
+          <pc:sldMk cId="3585817605" sldId="289"/>
+        </pc:sldMkLst>
+      </pc:sldChg>
+      <pc:sldChg chg="modSp mod">
+        <pc:chgData name="Frank Van Puyvelde" userId="ba4190df-4674-45fe-be59-1502c3515486" providerId="ADAL" clId="{3110D798-6ACE-415E-A5DC-2A40D2393998}" dt="2022-11-04T07:30:06.327" v="257" actId="27636"/>
+        <pc:sldMkLst>
+          <pc:docMk/>
+          <pc:sldMk cId="933411395" sldId="325"/>
+        </pc:sldMkLst>
+      </pc:sldChg>
+      <pc:sldChg chg="modSp mod">
+        <pc:chgData name="Frank Van Puyvelde" userId="ba4190df-4674-45fe-be59-1502c3515486" providerId="ADAL" clId="{3110D798-6ACE-415E-A5DC-2A40D2393998}" dt="2022-11-04T07:30:18.742" v="259" actId="27636"/>
+        <pc:sldMkLst>
+          <pc:docMk/>
+          <pc:sldMk cId="316877491" sldId="326"/>
+        </pc:sldMkLst>
+      </pc:sldChg>
+      <pc:sldChg chg="mod modShow">
+        <pc:chgData name="Frank Van Puyvelde" userId="ba4190df-4674-45fe-be59-1502c3515486" providerId="ADAL" clId="{3110D798-6ACE-415E-A5DC-2A40D2393998}" dt="2022-11-04T10:28:23.722" v="1479" actId="729"/>
+        <pc:sldMkLst>
+          <pc:docMk/>
+          <pc:sldMk cId="3736959151" sldId="332"/>
+        </pc:sldMkLst>
+      </pc:sldChg>
+      <pc:sldChg chg="modSp mod">
+        <pc:chgData name="Frank Van Puyvelde" userId="ba4190df-4674-45fe-be59-1502c3515486" providerId="ADAL" clId="{3110D798-6ACE-415E-A5DC-2A40D2393998}" dt="2022-11-04T08:06:01.899" v="516" actId="6549"/>
+        <pc:sldMkLst>
+          <pc:docMk/>
+          <pc:sldMk cId="138357203" sldId="335"/>
+        </pc:sldMkLst>
+      </pc:sldChg>
+      <pc:sldChg chg="modSp mod">
+        <pc:chgData name="Frank Van Puyvelde" userId="ba4190df-4674-45fe-be59-1502c3515486" providerId="ADAL" clId="{3110D798-6ACE-415E-A5DC-2A40D2393998}" dt="2022-11-04T08:13:40.816" v="638" actId="27636"/>
+        <pc:sldMkLst>
+          <pc:docMk/>
+          <pc:sldMk cId="2394352441" sldId="336"/>
+        </pc:sldMkLst>
+      </pc:sldChg>
+      <pc:sldChg chg="modSp mod">
+        <pc:chgData name="Frank Van Puyvelde" userId="ba4190df-4674-45fe-be59-1502c3515486" providerId="ADAL" clId="{3110D798-6ACE-415E-A5DC-2A40D2393998}" dt="2022-11-04T08:13:53.085" v="640" actId="27636"/>
+        <pc:sldMkLst>
+          <pc:docMk/>
+          <pc:sldMk cId="4003778944" sldId="341"/>
+        </pc:sldMkLst>
+      </pc:sldChg>
+      <pc:sldChg chg="modSp mod">
+        <pc:chgData name="Frank Van Puyvelde" userId="ba4190df-4674-45fe-be59-1502c3515486" providerId="ADAL" clId="{3110D798-6ACE-415E-A5DC-2A40D2393998}" dt="2022-11-04T09:17:17.583" v="1460" actId="20577"/>
+        <pc:sldMkLst>
+          <pc:docMk/>
+          <pc:sldMk cId="3381808942" sldId="349"/>
+        </pc:sldMkLst>
+      </pc:sldChg>
+      <pc:sldChg chg="mod modShow">
+        <pc:chgData name="Frank Van Puyvelde" userId="ba4190df-4674-45fe-be59-1502c3515486" providerId="ADAL" clId="{3110D798-6ACE-415E-A5DC-2A40D2393998}" dt="2022-11-04T09:19:58.957" v="1461" actId="729"/>
+        <pc:sldMkLst>
+          <pc:docMk/>
+          <pc:sldMk cId="2912706710" sldId="350"/>
+        </pc:sldMkLst>
+      </pc:sldChg>
+      <pc:sldChg chg="mod modShow">
+        <pc:chgData name="Frank Van Puyvelde" userId="ba4190df-4674-45fe-be59-1502c3515486" providerId="ADAL" clId="{3110D798-6ACE-415E-A5DC-2A40D2393998}" dt="2022-11-04T07:42:45.244" v="408" actId="729"/>
+        <pc:sldMkLst>
+          <pc:docMk/>
+          <pc:sldMk cId="3383233928" sldId="454"/>
+        </pc:sldMkLst>
+      </pc:sldChg>
+      <pc:sldChg chg="mod modShow">
+        <pc:chgData name="Frank Van Puyvelde" userId="ba4190df-4674-45fe-be59-1502c3515486" providerId="ADAL" clId="{3110D798-6ACE-415E-A5DC-2A40D2393998}" dt="2022-11-04T10:32:07.681" v="1480" actId="729"/>
+        <pc:sldMkLst>
+          <pc:docMk/>
+          <pc:sldMk cId="2679111294" sldId="456"/>
+        </pc:sldMkLst>
+      </pc:sldChg>
+      <pc:sldChg chg="mod modShow">
+        <pc:chgData name="Frank Van Puyvelde" userId="ba4190df-4674-45fe-be59-1502c3515486" providerId="ADAL" clId="{3110D798-6ACE-415E-A5DC-2A40D2393998}" dt="2022-11-04T10:28:20.825" v="1478" actId="729"/>
+        <pc:sldMkLst>
+          <pc:docMk/>
+          <pc:sldMk cId="2618378181" sldId="462"/>
+        </pc:sldMkLst>
+      </pc:sldChg>
+      <pc:sldChg chg="mod modShow">
+        <pc:chgData name="Frank Van Puyvelde" userId="ba4190df-4674-45fe-be59-1502c3515486" providerId="ADAL" clId="{3110D798-6ACE-415E-A5DC-2A40D2393998}" dt="2022-11-04T10:32:14.025" v="1481" actId="729"/>
+        <pc:sldMkLst>
+          <pc:docMk/>
+          <pc:sldMk cId="288524398" sldId="467"/>
+        </pc:sldMkLst>
+      </pc:sldChg>
+      <pc:sldChg chg="add del">
+        <pc:chgData name="Frank Van Puyvelde" userId="ba4190df-4674-45fe-be59-1502c3515486" providerId="ADAL" clId="{3110D798-6ACE-415E-A5DC-2A40D2393998}" dt="2022-11-04T07:37:24.885" v="404" actId="2696"/>
+        <pc:sldMkLst>
+          <pc:docMk/>
+          <pc:sldMk cId="1993958232" sldId="468"/>
+        </pc:sldMkLst>
+      </pc:sldChg>
+      <pc:sldChg chg="add">
+        <pc:chgData name="Frank Van Puyvelde" userId="ba4190df-4674-45fe-be59-1502c3515486" providerId="ADAL" clId="{3110D798-6ACE-415E-A5DC-2A40D2393998}" dt="2022-11-04T07:37:36.518" v="405"/>
+        <pc:sldMkLst>
+          <pc:docMk/>
+          <pc:sldMk cId="2804010608" sldId="468"/>
+        </pc:sldMkLst>
+      </pc:sldChg>
+      <pc:sldChg chg="modSp new del mod">
+        <pc:chgData name="Frank Van Puyvelde" userId="ba4190df-4674-45fe-be59-1502c3515486" providerId="ADAL" clId="{3110D798-6ACE-415E-A5DC-2A40D2393998}" dt="2022-11-04T07:18:02.292" v="150" actId="2696"/>
+        <pc:sldMkLst>
+          <pc:docMk/>
+          <pc:sldMk cId="3843229618" sldId="468"/>
+        </pc:sldMkLst>
+      </pc:sldChg>
+      <pc:sldChg chg="modSp new del mod">
+        <pc:chgData name="Frank Van Puyvelde" userId="ba4190df-4674-45fe-be59-1502c3515486" providerId="ADAL" clId="{3110D798-6ACE-415E-A5DC-2A40D2393998}" dt="2022-11-04T07:37:24.885" v="404" actId="2696"/>
+        <pc:sldMkLst>
+          <pc:docMk/>
+          <pc:sldMk cId="584124791" sldId="469"/>
+        </pc:sldMkLst>
+      </pc:sldChg>
+      <pc:sldChg chg="add">
+        <pc:chgData name="Frank Van Puyvelde" userId="ba4190df-4674-45fe-be59-1502c3515486" providerId="ADAL" clId="{3110D798-6ACE-415E-A5DC-2A40D2393998}" dt="2022-11-04T07:39:22.114" v="407"/>
+        <pc:sldMkLst>
+          <pc:docMk/>
+          <pc:sldMk cId="1735127709" sldId="469"/>
+        </pc:sldMkLst>
+      </pc:sldChg>
+      <pc:sldChg chg="add del">
+        <pc:chgData name="Frank Van Puyvelde" userId="ba4190df-4674-45fe-be59-1502c3515486" providerId="ADAL" clId="{3110D798-6ACE-415E-A5DC-2A40D2393998}" dt="2022-11-04T07:39:16.429" v="406" actId="2696"/>
+        <pc:sldMkLst>
+          <pc:docMk/>
+          <pc:sldMk cId="3429942354" sldId="469"/>
+        </pc:sldMkLst>
+      </pc:sldChg>
+      <pc:sldChg chg="modSp new mod">
+        <pc:chgData name="Frank Van Puyvelde" userId="ba4190df-4674-45fe-be59-1502c3515486" providerId="ADAL" clId="{3110D798-6ACE-415E-A5DC-2A40D2393998}" dt="2022-11-04T07:26:55.809" v="210" actId="20577"/>
+        <pc:sldMkLst>
+          <pc:docMk/>
+          <pc:sldMk cId="886004487" sldId="470"/>
+        </pc:sldMkLst>
+      </pc:sldChg>
+      <pc:sldChg chg="addSp delSp modSp new mod">
+        <pc:chgData name="Frank Van Puyvelde" userId="ba4190df-4674-45fe-be59-1502c3515486" providerId="ADAL" clId="{3110D798-6ACE-415E-A5DC-2A40D2393998}" dt="2022-11-04T07:34:43.950" v="403" actId="27636"/>
+        <pc:sldMkLst>
+          <pc:docMk/>
+          <pc:sldMk cId="3804363481" sldId="471"/>
+        </pc:sldMkLst>
+      </pc:sldChg>
+      <pc:sldChg chg="modSp new mod">
+        <pc:chgData name="Frank Van Puyvelde" userId="ba4190df-4674-45fe-be59-1502c3515486" providerId="ADAL" clId="{3110D798-6ACE-415E-A5DC-2A40D2393998}" dt="2022-11-04T08:10:43.764" v="630" actId="6549"/>
+        <pc:sldMkLst>
+          <pc:docMk/>
+          <pc:sldMk cId="1149193662" sldId="472"/>
+        </pc:sldMkLst>
+      </pc:sldChg>
+      <pc:sldChg chg="modSp new mod">
+        <pc:chgData name="Frank Van Puyvelde" userId="ba4190df-4674-45fe-be59-1502c3515486" providerId="ADAL" clId="{3110D798-6ACE-415E-A5DC-2A40D2393998}" dt="2022-11-04T09:01:31.017" v="1131" actId="27636"/>
+        <pc:sldMkLst>
+          <pc:docMk/>
+          <pc:sldMk cId="1792444248" sldId="473"/>
+        </pc:sldMkLst>
+      </pc:sldChg>
+      <pc:sldChg chg="modSp new mod">
+        <pc:chgData name="Frank Van Puyvelde" userId="ba4190df-4674-45fe-be59-1502c3515486" providerId="ADAL" clId="{3110D798-6ACE-415E-A5DC-2A40D2393998}" dt="2022-11-04T09:04:21.760" v="1243" actId="6549"/>
+        <pc:sldMkLst>
+          <pc:docMk/>
+          <pc:sldMk cId="3574212989" sldId="474"/>
+        </pc:sldMkLst>
+      </pc:sldChg>
+      <pc:sldChg chg="modSp new mod">
+        <pc:chgData name="Frank Van Puyvelde" userId="ba4190df-4674-45fe-be59-1502c3515486" providerId="ADAL" clId="{3110D798-6ACE-415E-A5DC-2A40D2393998}" dt="2022-11-04T09:09:18.998" v="1295" actId="6549"/>
+        <pc:sldMkLst>
+          <pc:docMk/>
+          <pc:sldMk cId="657172361" sldId="475"/>
+        </pc:sldMkLst>
+      </pc:sldChg>
+      <pc:sldChg chg="modSp new mod">
+        <pc:chgData name="Frank Van Puyvelde" userId="ba4190df-4674-45fe-be59-1502c3515486" providerId="ADAL" clId="{3110D798-6ACE-415E-A5DC-2A40D2393998}" dt="2022-11-04T09:16:01.280" v="1452" actId="6549"/>
+        <pc:sldMkLst>
+          <pc:docMk/>
+          <pc:sldMk cId="669374658" sldId="476"/>
+        </pc:sldMkLst>
+      </pc:sldChg>
+      <pc:sldChg chg="modSp new mod">
+        <pc:chgData name="Frank Van Puyvelde" userId="ba4190df-4674-45fe-be59-1502c3515486" providerId="ADAL" clId="{3110D798-6ACE-415E-A5DC-2A40D2393998}" dt="2022-11-04T10:22:11.941" v="1477" actId="20577"/>
+        <pc:sldMkLst>
+          <pc:docMk/>
+          <pc:sldMk cId="1005609097" sldId="477"/>
+        </pc:sldMkLst>
+      </pc:sldChg>
+    </pc:docChg>
+  </pc:docChgLst>
+  <pc:docChgLst>
+    <pc:chgData name="Frank Van Puyvelde" userId="ba4190df-4674-45fe-be59-1502c3515486" providerId="ADAL" clId="{2427602A-053C-4C5D-9F1D-9937C3B35445}"/>
+    <pc:docChg chg="custSel modSld">
+      <pc:chgData name="Frank Van Puyvelde" userId="ba4190df-4674-45fe-be59-1502c3515486" providerId="ADAL" clId="{2427602A-053C-4C5D-9F1D-9937C3B35445}" dt="2024-05-27T08:52:05.608" v="53" actId="20577"/>
+      <pc:docMkLst>
+        <pc:docMk/>
+      </pc:docMkLst>
+      <pc:sldChg chg="modSp mod">
+        <pc:chgData name="Frank Van Puyvelde" userId="ba4190df-4674-45fe-be59-1502c3515486" providerId="ADAL" clId="{2427602A-053C-4C5D-9F1D-9937C3B35445}" dt="2024-05-27T08:52:05.608" v="53" actId="20577"/>
+        <pc:sldMkLst>
+          <pc:docMk/>
+          <pc:sldMk cId="779977204" sldId="265"/>
+        </pc:sldMkLst>
+      </pc:sldChg>
+      <pc:sldChg chg="modSp mod modShow">
+        <pc:chgData name="Frank Van Puyvelde" userId="ba4190df-4674-45fe-be59-1502c3515486" providerId="ADAL" clId="{2427602A-053C-4C5D-9F1D-9937C3B35445}" dt="2024-05-27T08:48:07.568" v="9" actId="20577"/>
+        <pc:sldMkLst>
+          <pc:docMk/>
+          <pc:sldMk cId="3383233928" sldId="454"/>
+        </pc:sldMkLst>
+      </pc:sldChg>
+      <pc:sldChg chg="modSp mod">
+        <pc:chgData name="Frank Van Puyvelde" userId="ba4190df-4674-45fe-be59-1502c3515486" providerId="ADAL" clId="{2427602A-053C-4C5D-9F1D-9937C3B35445}" dt="2024-05-27T08:51:24.572" v="18" actId="27636"/>
+        <pc:sldMkLst>
+          <pc:docMk/>
+          <pc:sldMk cId="3803441011" sldId="457"/>
+        </pc:sldMkLst>
+      </pc:sldChg>
+    </pc:docChg>
+  </pc:docChgLst>
+  <pc:docChgLst>
     <pc:chgData name="Frank Van Puyvelde" userId="ba4190df-4674-45fe-be59-1502c3515486" providerId="ADAL" clId="{5141E9B9-4900-4C1A-9A14-2A5BA0E28CAB}"/>
     <pc:docChg chg="custSel addSld modSld modSection">
       <pc:chgData name="Frank Van Puyvelde" userId="ba4190df-4674-45fe-be59-1502c3515486" providerId="ADAL" clId="{5141E9B9-4900-4C1A-9A14-2A5BA0E28CAB}" dt="2024-01-24T13:03:32.962" v="277" actId="5793"/>
@@ -863,6 +1119,22 @@
         <pc:sldMkLst>
           <pc:docMk/>
           <pc:sldMk cId="3174211031" sldId="481"/>
+        </pc:sldMkLst>
+      </pc:sldChg>
+    </pc:docChg>
+  </pc:docChgLst>
+  <pc:docChgLst>
+    <pc:chgData name="Frank Van Puyvelde" userId="ba4190df-4674-45fe-be59-1502c3515486" providerId="ADAL" clId="{5A54E2D7-154E-49E1-BD00-13BB1EE57AFF}"/>
+    <pc:docChg chg="modSld">
+      <pc:chgData name="Frank Van Puyvelde" userId="ba4190df-4674-45fe-be59-1502c3515486" providerId="ADAL" clId="{5A54E2D7-154E-49E1-BD00-13BB1EE57AFF}" dt="2024-02-08T12:36:54.984" v="0" actId="729"/>
+      <pc:docMkLst>
+        <pc:docMk/>
+      </pc:docMkLst>
+      <pc:sldChg chg="mod modShow">
+        <pc:chgData name="Frank Van Puyvelde" userId="ba4190df-4674-45fe-be59-1502c3515486" providerId="ADAL" clId="{5A54E2D7-154E-49E1-BD00-13BB1EE57AFF}" dt="2024-02-08T12:36:54.984" v="0" actId="729"/>
+        <pc:sldMkLst>
+          <pc:docMk/>
+          <pc:sldMk cId="1650882093" sldId="328"/>
         </pc:sldMkLst>
       </pc:sldChg>
     </pc:docChg>
@@ -1149,278 +1421,6 @@
       </pc:sldChg>
     </pc:docChg>
   </pc:docChgLst>
-  <pc:docChgLst>
-    <pc:chgData name="Frank Van Puyvelde" userId="ba4190df-4674-45fe-be59-1502c3515486" providerId="ADAL" clId="{5A54E2D7-154E-49E1-BD00-13BB1EE57AFF}"/>
-    <pc:docChg chg="modSld">
-      <pc:chgData name="Frank Van Puyvelde" userId="ba4190df-4674-45fe-be59-1502c3515486" providerId="ADAL" clId="{5A54E2D7-154E-49E1-BD00-13BB1EE57AFF}" dt="2024-02-08T12:36:54.984" v="0" actId="729"/>
-      <pc:docMkLst>
-        <pc:docMk/>
-      </pc:docMkLst>
-      <pc:sldChg chg="mod modShow">
-        <pc:chgData name="Frank Van Puyvelde" userId="ba4190df-4674-45fe-be59-1502c3515486" providerId="ADAL" clId="{5A54E2D7-154E-49E1-BD00-13BB1EE57AFF}" dt="2024-02-08T12:36:54.984" v="0" actId="729"/>
-        <pc:sldMkLst>
-          <pc:docMk/>
-          <pc:sldMk cId="1650882093" sldId="328"/>
-        </pc:sldMkLst>
-      </pc:sldChg>
-    </pc:docChg>
-  </pc:docChgLst>
-  <pc:docChgLst>
-    <pc:chgData name="Frank Van Puyvelde" userId="ba4190df-4674-45fe-be59-1502c3515486" providerId="ADAL" clId="{AA9463B4-8017-459B-8EBC-B2A62FCBE215}"/>
-    <pc:docChg chg="custSel addSld modSld modSection">
-      <pc:chgData name="Frank Van Puyvelde" userId="ba4190df-4674-45fe-be59-1502c3515486" providerId="ADAL" clId="{AA9463B4-8017-459B-8EBC-B2A62FCBE215}" dt="2023-02-09T16:17:23.857" v="36" actId="20577"/>
-      <pc:docMkLst>
-        <pc:docMk/>
-      </pc:docMkLst>
-      <pc:sldChg chg="modSp">
-        <pc:chgData name="Frank Van Puyvelde" userId="ba4190df-4674-45fe-be59-1502c3515486" providerId="ADAL" clId="{AA9463B4-8017-459B-8EBC-B2A62FCBE215}" dt="2023-02-09T09:14:22.384" v="0"/>
-        <pc:sldMkLst>
-          <pc:docMk/>
-          <pc:sldMk cId="2319990141" sldId="287"/>
-        </pc:sldMkLst>
-      </pc:sldChg>
-      <pc:sldChg chg="modSp new mod">
-        <pc:chgData name="Frank Van Puyvelde" userId="ba4190df-4674-45fe-be59-1502c3515486" providerId="ADAL" clId="{AA9463B4-8017-459B-8EBC-B2A62FCBE215}" dt="2023-02-09T16:17:23.857" v="36" actId="20577"/>
-        <pc:sldMkLst>
-          <pc:docMk/>
-          <pc:sldMk cId="2119275025" sldId="478"/>
-        </pc:sldMkLst>
-      </pc:sldChg>
-    </pc:docChg>
-  </pc:docChgLst>
-  <pc:docChgLst>
-    <pc:chgData name="Frank Van Puyvelde" userId="ba4190df-4674-45fe-be59-1502c3515486" providerId="ADAL" clId="{3110D798-6ACE-415E-A5DC-2A40D2393998}"/>
-    <pc:docChg chg="undo custSel addSld delSld modSld modSection">
-      <pc:chgData name="Frank Van Puyvelde" userId="ba4190df-4674-45fe-be59-1502c3515486" providerId="ADAL" clId="{3110D798-6ACE-415E-A5DC-2A40D2393998}" dt="2022-11-12T10:27:28.525" v="1559" actId="403"/>
-      <pc:docMkLst>
-        <pc:docMk/>
-      </pc:docMkLst>
-      <pc:sldChg chg="modSp mod">
-        <pc:chgData name="Frank Van Puyvelde" userId="ba4190df-4674-45fe-be59-1502c3515486" providerId="ADAL" clId="{3110D798-6ACE-415E-A5DC-2A40D2393998}" dt="2022-11-04T07:22:33.307" v="169" actId="20577"/>
-        <pc:sldMkLst>
-          <pc:docMk/>
-          <pc:sldMk cId="2072749382" sldId="264"/>
-        </pc:sldMkLst>
-      </pc:sldChg>
-      <pc:sldChg chg="modSp mod">
-        <pc:chgData name="Frank Van Puyvelde" userId="ba4190df-4674-45fe-be59-1502c3515486" providerId="ADAL" clId="{3110D798-6ACE-415E-A5DC-2A40D2393998}" dt="2022-11-04T07:47:45.712" v="446" actId="5793"/>
-        <pc:sldMkLst>
-          <pc:docMk/>
-          <pc:sldMk cId="779977204" sldId="265"/>
-        </pc:sldMkLst>
-      </pc:sldChg>
-      <pc:sldChg chg="modSp mod">
-        <pc:chgData name="Frank Van Puyvelde" userId="ba4190df-4674-45fe-be59-1502c3515486" providerId="ADAL" clId="{3110D798-6ACE-415E-A5DC-2A40D2393998}" dt="2022-11-04T08:48:44.874" v="870" actId="20577"/>
-        <pc:sldMkLst>
-          <pc:docMk/>
-          <pc:sldMk cId="1685400709" sldId="266"/>
-        </pc:sldMkLst>
-      </pc:sldChg>
-      <pc:sldChg chg="modSp mod">
-        <pc:chgData name="Frank Van Puyvelde" userId="ba4190df-4674-45fe-be59-1502c3515486" providerId="ADAL" clId="{3110D798-6ACE-415E-A5DC-2A40D2393998}" dt="2022-11-12T10:27:28.525" v="1559" actId="403"/>
-        <pc:sldMkLst>
-          <pc:docMk/>
-          <pc:sldMk cId="2423346693" sldId="267"/>
-        </pc:sldMkLst>
-      </pc:sldChg>
-      <pc:sldChg chg="modSp mod">
-        <pc:chgData name="Frank Van Puyvelde" userId="ba4190df-4674-45fe-be59-1502c3515486" providerId="ADAL" clId="{3110D798-6ACE-415E-A5DC-2A40D2393998}" dt="2022-11-03T15:07:36.652" v="0" actId="113"/>
-        <pc:sldMkLst>
-          <pc:docMk/>
-          <pc:sldMk cId="1364474533" sldId="288"/>
-        </pc:sldMkLst>
-      </pc:sldChg>
-      <pc:sldChg chg="modSp mod">
-        <pc:chgData name="Frank Van Puyvelde" userId="ba4190df-4674-45fe-be59-1502c3515486" providerId="ADAL" clId="{3110D798-6ACE-415E-A5DC-2A40D2393998}" dt="2022-11-03T15:24:28.709" v="25" actId="20577"/>
-        <pc:sldMkLst>
-          <pc:docMk/>
-          <pc:sldMk cId="3585817605" sldId="289"/>
-        </pc:sldMkLst>
-      </pc:sldChg>
-      <pc:sldChg chg="modSp mod">
-        <pc:chgData name="Frank Van Puyvelde" userId="ba4190df-4674-45fe-be59-1502c3515486" providerId="ADAL" clId="{3110D798-6ACE-415E-A5DC-2A40D2393998}" dt="2022-11-04T07:30:06.327" v="257" actId="27636"/>
-        <pc:sldMkLst>
-          <pc:docMk/>
-          <pc:sldMk cId="933411395" sldId="325"/>
-        </pc:sldMkLst>
-      </pc:sldChg>
-      <pc:sldChg chg="modSp mod">
-        <pc:chgData name="Frank Van Puyvelde" userId="ba4190df-4674-45fe-be59-1502c3515486" providerId="ADAL" clId="{3110D798-6ACE-415E-A5DC-2A40D2393998}" dt="2022-11-04T07:30:18.742" v="259" actId="27636"/>
-        <pc:sldMkLst>
-          <pc:docMk/>
-          <pc:sldMk cId="316877491" sldId="326"/>
-        </pc:sldMkLst>
-      </pc:sldChg>
-      <pc:sldChg chg="mod modShow">
-        <pc:chgData name="Frank Van Puyvelde" userId="ba4190df-4674-45fe-be59-1502c3515486" providerId="ADAL" clId="{3110D798-6ACE-415E-A5DC-2A40D2393998}" dt="2022-11-04T10:28:23.722" v="1479" actId="729"/>
-        <pc:sldMkLst>
-          <pc:docMk/>
-          <pc:sldMk cId="3736959151" sldId="332"/>
-        </pc:sldMkLst>
-      </pc:sldChg>
-      <pc:sldChg chg="modSp mod">
-        <pc:chgData name="Frank Van Puyvelde" userId="ba4190df-4674-45fe-be59-1502c3515486" providerId="ADAL" clId="{3110D798-6ACE-415E-A5DC-2A40D2393998}" dt="2022-11-04T08:06:01.899" v="516" actId="6549"/>
-        <pc:sldMkLst>
-          <pc:docMk/>
-          <pc:sldMk cId="138357203" sldId="335"/>
-        </pc:sldMkLst>
-      </pc:sldChg>
-      <pc:sldChg chg="modSp mod">
-        <pc:chgData name="Frank Van Puyvelde" userId="ba4190df-4674-45fe-be59-1502c3515486" providerId="ADAL" clId="{3110D798-6ACE-415E-A5DC-2A40D2393998}" dt="2022-11-04T08:13:40.816" v="638" actId="27636"/>
-        <pc:sldMkLst>
-          <pc:docMk/>
-          <pc:sldMk cId="2394352441" sldId="336"/>
-        </pc:sldMkLst>
-      </pc:sldChg>
-      <pc:sldChg chg="modSp mod">
-        <pc:chgData name="Frank Van Puyvelde" userId="ba4190df-4674-45fe-be59-1502c3515486" providerId="ADAL" clId="{3110D798-6ACE-415E-A5DC-2A40D2393998}" dt="2022-11-04T08:13:53.085" v="640" actId="27636"/>
-        <pc:sldMkLst>
-          <pc:docMk/>
-          <pc:sldMk cId="4003778944" sldId="341"/>
-        </pc:sldMkLst>
-      </pc:sldChg>
-      <pc:sldChg chg="modSp mod">
-        <pc:chgData name="Frank Van Puyvelde" userId="ba4190df-4674-45fe-be59-1502c3515486" providerId="ADAL" clId="{3110D798-6ACE-415E-A5DC-2A40D2393998}" dt="2022-11-04T09:17:17.583" v="1460" actId="20577"/>
-        <pc:sldMkLst>
-          <pc:docMk/>
-          <pc:sldMk cId="3381808942" sldId="349"/>
-        </pc:sldMkLst>
-      </pc:sldChg>
-      <pc:sldChg chg="mod modShow">
-        <pc:chgData name="Frank Van Puyvelde" userId="ba4190df-4674-45fe-be59-1502c3515486" providerId="ADAL" clId="{3110D798-6ACE-415E-A5DC-2A40D2393998}" dt="2022-11-04T09:19:58.957" v="1461" actId="729"/>
-        <pc:sldMkLst>
-          <pc:docMk/>
-          <pc:sldMk cId="2912706710" sldId="350"/>
-        </pc:sldMkLst>
-      </pc:sldChg>
-      <pc:sldChg chg="mod modShow">
-        <pc:chgData name="Frank Van Puyvelde" userId="ba4190df-4674-45fe-be59-1502c3515486" providerId="ADAL" clId="{3110D798-6ACE-415E-A5DC-2A40D2393998}" dt="2022-11-04T07:42:45.244" v="408" actId="729"/>
-        <pc:sldMkLst>
-          <pc:docMk/>
-          <pc:sldMk cId="3383233928" sldId="454"/>
-        </pc:sldMkLst>
-      </pc:sldChg>
-      <pc:sldChg chg="mod modShow">
-        <pc:chgData name="Frank Van Puyvelde" userId="ba4190df-4674-45fe-be59-1502c3515486" providerId="ADAL" clId="{3110D798-6ACE-415E-A5DC-2A40D2393998}" dt="2022-11-04T10:32:07.681" v="1480" actId="729"/>
-        <pc:sldMkLst>
-          <pc:docMk/>
-          <pc:sldMk cId="2679111294" sldId="456"/>
-        </pc:sldMkLst>
-      </pc:sldChg>
-      <pc:sldChg chg="mod modShow">
-        <pc:chgData name="Frank Van Puyvelde" userId="ba4190df-4674-45fe-be59-1502c3515486" providerId="ADAL" clId="{3110D798-6ACE-415E-A5DC-2A40D2393998}" dt="2022-11-04T10:28:20.825" v="1478" actId="729"/>
-        <pc:sldMkLst>
-          <pc:docMk/>
-          <pc:sldMk cId="2618378181" sldId="462"/>
-        </pc:sldMkLst>
-      </pc:sldChg>
-      <pc:sldChg chg="mod modShow">
-        <pc:chgData name="Frank Van Puyvelde" userId="ba4190df-4674-45fe-be59-1502c3515486" providerId="ADAL" clId="{3110D798-6ACE-415E-A5DC-2A40D2393998}" dt="2022-11-04T10:32:14.025" v="1481" actId="729"/>
-        <pc:sldMkLst>
-          <pc:docMk/>
-          <pc:sldMk cId="288524398" sldId="467"/>
-        </pc:sldMkLst>
-      </pc:sldChg>
-      <pc:sldChg chg="add del">
-        <pc:chgData name="Frank Van Puyvelde" userId="ba4190df-4674-45fe-be59-1502c3515486" providerId="ADAL" clId="{3110D798-6ACE-415E-A5DC-2A40D2393998}" dt="2022-11-04T07:37:24.885" v="404" actId="2696"/>
-        <pc:sldMkLst>
-          <pc:docMk/>
-          <pc:sldMk cId="1993958232" sldId="468"/>
-        </pc:sldMkLst>
-      </pc:sldChg>
-      <pc:sldChg chg="add">
-        <pc:chgData name="Frank Van Puyvelde" userId="ba4190df-4674-45fe-be59-1502c3515486" providerId="ADAL" clId="{3110D798-6ACE-415E-A5DC-2A40D2393998}" dt="2022-11-04T07:37:36.518" v="405"/>
-        <pc:sldMkLst>
-          <pc:docMk/>
-          <pc:sldMk cId="2804010608" sldId="468"/>
-        </pc:sldMkLst>
-      </pc:sldChg>
-      <pc:sldChg chg="modSp new del mod">
-        <pc:chgData name="Frank Van Puyvelde" userId="ba4190df-4674-45fe-be59-1502c3515486" providerId="ADAL" clId="{3110D798-6ACE-415E-A5DC-2A40D2393998}" dt="2022-11-04T07:18:02.292" v="150" actId="2696"/>
-        <pc:sldMkLst>
-          <pc:docMk/>
-          <pc:sldMk cId="3843229618" sldId="468"/>
-        </pc:sldMkLst>
-      </pc:sldChg>
-      <pc:sldChg chg="modSp new del mod">
-        <pc:chgData name="Frank Van Puyvelde" userId="ba4190df-4674-45fe-be59-1502c3515486" providerId="ADAL" clId="{3110D798-6ACE-415E-A5DC-2A40D2393998}" dt="2022-11-04T07:37:24.885" v="404" actId="2696"/>
-        <pc:sldMkLst>
-          <pc:docMk/>
-          <pc:sldMk cId="584124791" sldId="469"/>
-        </pc:sldMkLst>
-      </pc:sldChg>
-      <pc:sldChg chg="add">
-        <pc:chgData name="Frank Van Puyvelde" userId="ba4190df-4674-45fe-be59-1502c3515486" providerId="ADAL" clId="{3110D798-6ACE-415E-A5DC-2A40D2393998}" dt="2022-11-04T07:39:22.114" v="407"/>
-        <pc:sldMkLst>
-          <pc:docMk/>
-          <pc:sldMk cId="1735127709" sldId="469"/>
-        </pc:sldMkLst>
-      </pc:sldChg>
-      <pc:sldChg chg="add del">
-        <pc:chgData name="Frank Van Puyvelde" userId="ba4190df-4674-45fe-be59-1502c3515486" providerId="ADAL" clId="{3110D798-6ACE-415E-A5DC-2A40D2393998}" dt="2022-11-04T07:39:16.429" v="406" actId="2696"/>
-        <pc:sldMkLst>
-          <pc:docMk/>
-          <pc:sldMk cId="3429942354" sldId="469"/>
-        </pc:sldMkLst>
-      </pc:sldChg>
-      <pc:sldChg chg="modSp new mod">
-        <pc:chgData name="Frank Van Puyvelde" userId="ba4190df-4674-45fe-be59-1502c3515486" providerId="ADAL" clId="{3110D798-6ACE-415E-A5DC-2A40D2393998}" dt="2022-11-04T07:26:55.809" v="210" actId="20577"/>
-        <pc:sldMkLst>
-          <pc:docMk/>
-          <pc:sldMk cId="886004487" sldId="470"/>
-        </pc:sldMkLst>
-      </pc:sldChg>
-      <pc:sldChg chg="addSp delSp modSp new mod">
-        <pc:chgData name="Frank Van Puyvelde" userId="ba4190df-4674-45fe-be59-1502c3515486" providerId="ADAL" clId="{3110D798-6ACE-415E-A5DC-2A40D2393998}" dt="2022-11-04T07:34:43.950" v="403" actId="27636"/>
-        <pc:sldMkLst>
-          <pc:docMk/>
-          <pc:sldMk cId="3804363481" sldId="471"/>
-        </pc:sldMkLst>
-      </pc:sldChg>
-      <pc:sldChg chg="modSp new mod">
-        <pc:chgData name="Frank Van Puyvelde" userId="ba4190df-4674-45fe-be59-1502c3515486" providerId="ADAL" clId="{3110D798-6ACE-415E-A5DC-2A40D2393998}" dt="2022-11-04T08:10:43.764" v="630" actId="6549"/>
-        <pc:sldMkLst>
-          <pc:docMk/>
-          <pc:sldMk cId="1149193662" sldId="472"/>
-        </pc:sldMkLst>
-      </pc:sldChg>
-      <pc:sldChg chg="modSp new mod">
-        <pc:chgData name="Frank Van Puyvelde" userId="ba4190df-4674-45fe-be59-1502c3515486" providerId="ADAL" clId="{3110D798-6ACE-415E-A5DC-2A40D2393998}" dt="2022-11-04T09:01:31.017" v="1131" actId="27636"/>
-        <pc:sldMkLst>
-          <pc:docMk/>
-          <pc:sldMk cId="1792444248" sldId="473"/>
-        </pc:sldMkLst>
-      </pc:sldChg>
-      <pc:sldChg chg="modSp new mod">
-        <pc:chgData name="Frank Van Puyvelde" userId="ba4190df-4674-45fe-be59-1502c3515486" providerId="ADAL" clId="{3110D798-6ACE-415E-A5DC-2A40D2393998}" dt="2022-11-04T09:04:21.760" v="1243" actId="6549"/>
-        <pc:sldMkLst>
-          <pc:docMk/>
-          <pc:sldMk cId="3574212989" sldId="474"/>
-        </pc:sldMkLst>
-      </pc:sldChg>
-      <pc:sldChg chg="modSp new mod">
-        <pc:chgData name="Frank Van Puyvelde" userId="ba4190df-4674-45fe-be59-1502c3515486" providerId="ADAL" clId="{3110D798-6ACE-415E-A5DC-2A40D2393998}" dt="2022-11-04T09:09:18.998" v="1295" actId="6549"/>
-        <pc:sldMkLst>
-          <pc:docMk/>
-          <pc:sldMk cId="657172361" sldId="475"/>
-        </pc:sldMkLst>
-      </pc:sldChg>
-      <pc:sldChg chg="modSp new mod">
-        <pc:chgData name="Frank Van Puyvelde" userId="ba4190df-4674-45fe-be59-1502c3515486" providerId="ADAL" clId="{3110D798-6ACE-415E-A5DC-2A40D2393998}" dt="2022-11-04T09:16:01.280" v="1452" actId="6549"/>
-        <pc:sldMkLst>
-          <pc:docMk/>
-          <pc:sldMk cId="669374658" sldId="476"/>
-        </pc:sldMkLst>
-      </pc:sldChg>
-      <pc:sldChg chg="modSp new mod">
-        <pc:chgData name="Frank Van Puyvelde" userId="ba4190df-4674-45fe-be59-1502c3515486" providerId="ADAL" clId="{3110D798-6ACE-415E-A5DC-2A40D2393998}" dt="2022-11-04T10:22:11.941" v="1477" actId="20577"/>
-        <pc:sldMkLst>
-          <pc:docMk/>
-          <pc:sldMk cId="1005609097" sldId="477"/>
-        </pc:sldMkLst>
-      </pc:sldChg>
-    </pc:docChg>
-  </pc:docChgLst>
 </pc:chgInfo>
 </file>
 
@@ -1539,7 +1539,7 @@
           <a:p>
             <a:fld id="{7A375BC9-5AAE-4E1F-9FAE-BC04149B1DB3}" type="datetimeFigureOut">
               <a:rPr lang="nl-BE" smtClean="0"/>
-              <a:t>10/10/2025</a:t>
+              <a:t>2/10/2026</a:t>
             </a:fld>
             <a:endParaRPr lang="nl-BE"/>
           </a:p>
@@ -1938,7 +1938,7 @@
           <a:p>
             <a:fld id="{25D4C14B-8B81-49E7-9BC7-8AE29B5E2ADB}" type="datetimeFigureOut">
               <a:rPr lang="nl-BE" smtClean="0"/>
-              <a:t>10/10/2025</a:t>
+              <a:t>2/10/2026</a:t>
             </a:fld>
             <a:endParaRPr lang="nl-BE"/>
           </a:p>
@@ -2108,7 +2108,7 @@
           <a:p>
             <a:fld id="{25D4C14B-8B81-49E7-9BC7-8AE29B5E2ADB}" type="datetimeFigureOut">
               <a:rPr lang="nl-BE" smtClean="0"/>
-              <a:t>10/10/2025</a:t>
+              <a:t>2/10/2026</a:t>
             </a:fld>
             <a:endParaRPr lang="nl-BE"/>
           </a:p>
@@ -2288,7 +2288,7 @@
           <a:p>
             <a:fld id="{25D4C14B-8B81-49E7-9BC7-8AE29B5E2ADB}" type="datetimeFigureOut">
               <a:rPr lang="nl-BE" smtClean="0"/>
-              <a:t>10/10/2025</a:t>
+              <a:t>2/10/2026</a:t>
             </a:fld>
             <a:endParaRPr lang="nl-BE"/>
           </a:p>
@@ -2458,7 +2458,7 @@
           <a:p>
             <a:fld id="{25D4C14B-8B81-49E7-9BC7-8AE29B5E2ADB}" type="datetimeFigureOut">
               <a:rPr lang="nl-BE" smtClean="0"/>
-              <a:t>10/10/2025</a:t>
+              <a:t>2/10/2026</a:t>
             </a:fld>
             <a:endParaRPr lang="nl-BE"/>
           </a:p>
@@ -2704,7 +2704,7 @@
           <a:p>
             <a:fld id="{25D4C14B-8B81-49E7-9BC7-8AE29B5E2ADB}" type="datetimeFigureOut">
               <a:rPr lang="nl-BE" smtClean="0"/>
-              <a:t>10/10/2025</a:t>
+              <a:t>2/10/2026</a:t>
             </a:fld>
             <a:endParaRPr lang="nl-BE"/>
           </a:p>
@@ -2936,7 +2936,7 @@
           <a:p>
             <a:fld id="{25D4C14B-8B81-49E7-9BC7-8AE29B5E2ADB}" type="datetimeFigureOut">
               <a:rPr lang="nl-BE" smtClean="0"/>
-              <a:t>10/10/2025</a:t>
+              <a:t>2/10/2026</a:t>
             </a:fld>
             <a:endParaRPr lang="nl-BE"/>
           </a:p>
@@ -3303,7 +3303,7 @@
           <a:p>
             <a:fld id="{25D4C14B-8B81-49E7-9BC7-8AE29B5E2ADB}" type="datetimeFigureOut">
               <a:rPr lang="nl-BE" smtClean="0"/>
-              <a:t>10/10/2025</a:t>
+              <a:t>2/10/2026</a:t>
             </a:fld>
             <a:endParaRPr lang="nl-BE"/>
           </a:p>
@@ -3421,7 +3421,7 @@
           <a:p>
             <a:fld id="{25D4C14B-8B81-49E7-9BC7-8AE29B5E2ADB}" type="datetimeFigureOut">
               <a:rPr lang="nl-BE" smtClean="0"/>
-              <a:t>10/10/2025</a:t>
+              <a:t>2/10/2026</a:t>
             </a:fld>
             <a:endParaRPr lang="nl-BE"/>
           </a:p>
@@ -3516,7 +3516,7 @@
           <a:p>
             <a:fld id="{25D4C14B-8B81-49E7-9BC7-8AE29B5E2ADB}" type="datetimeFigureOut">
               <a:rPr lang="nl-BE" smtClean="0"/>
-              <a:t>10/10/2025</a:t>
+              <a:t>2/10/2026</a:t>
             </a:fld>
             <a:endParaRPr lang="nl-BE"/>
           </a:p>
@@ -3793,7 +3793,7 @@
           <a:p>
             <a:fld id="{25D4C14B-8B81-49E7-9BC7-8AE29B5E2ADB}" type="datetimeFigureOut">
               <a:rPr lang="nl-BE" smtClean="0"/>
-              <a:t>10/10/2025</a:t>
+              <a:t>2/10/2026</a:t>
             </a:fld>
             <a:endParaRPr lang="nl-BE"/>
           </a:p>
@@ -4046,7 +4046,7 @@
           <a:p>
             <a:fld id="{25D4C14B-8B81-49E7-9BC7-8AE29B5E2ADB}" type="datetimeFigureOut">
               <a:rPr lang="nl-BE" smtClean="0"/>
-              <a:t>10/10/2025</a:t>
+              <a:t>2/10/2026</a:t>
             </a:fld>
             <a:endParaRPr lang="nl-BE"/>
           </a:p>
@@ -4259,7 +4259,7 @@
           <a:p>
             <a:fld id="{25D4C14B-8B81-49E7-9BC7-8AE29B5E2ADB}" type="datetimeFigureOut">
               <a:rPr lang="nl-BE" smtClean="0"/>
-              <a:t>10/10/2025</a:t>
+              <a:t>2/10/2026</a:t>
             </a:fld>
             <a:endParaRPr lang="nl-BE"/>
           </a:p>
@@ -14400,11 +14400,11 @@
   <p:clrMapOvr>
     <a:masterClrMapping/>
   </p:clrMapOvr>
-  <mc:AlternateContent xmlns:mc="http://schemas.openxmlformats.org/markup-compatibility/2006">
-    <mc:Choice xmlns:p14="http://schemas.microsoft.com/office/powerpoint/2010/main" Requires="p14">
+  <mc:AlternateContent xmlns:mc="http://schemas.openxmlformats.org/markup-compatibility/2006" xmlns:p14="http://schemas.microsoft.com/office/powerpoint/2010/main">
+    <mc:Choice Requires="p14">
       <p:transition spd="slow" p14:dur="2000" advTm="3469"/>
     </mc:Choice>
-    <mc:Fallback>
+    <mc:Fallback xmlns="">
       <p:transition spd="slow" advTm="3469"/>
     </mc:Fallback>
   </mc:AlternateContent>

--- a/slides-pptx/06-Python_intro-dataContainers.pptx
+++ b/slides-pptx/06-Python_intro-dataContainers.pptx
@@ -1539,7 +1539,7 @@
           <a:p>
             <a:fld id="{7A375BC9-5AAE-4E1F-9FAE-BC04149B1DB3}" type="datetimeFigureOut">
               <a:rPr lang="nl-BE" smtClean="0"/>
-              <a:t>2/10/2026</a:t>
+              <a:t>5/10/2026</a:t>
             </a:fld>
             <a:endParaRPr lang="nl-BE"/>
           </a:p>
@@ -1938,7 +1938,7 @@
           <a:p>
             <a:fld id="{25D4C14B-8B81-49E7-9BC7-8AE29B5E2ADB}" type="datetimeFigureOut">
               <a:rPr lang="nl-BE" smtClean="0"/>
-              <a:t>2/10/2026</a:t>
+              <a:t>5/10/2026</a:t>
             </a:fld>
             <a:endParaRPr lang="nl-BE"/>
           </a:p>
@@ -2108,7 +2108,7 @@
           <a:p>
             <a:fld id="{25D4C14B-8B81-49E7-9BC7-8AE29B5E2ADB}" type="datetimeFigureOut">
               <a:rPr lang="nl-BE" smtClean="0"/>
-              <a:t>2/10/2026</a:t>
+              <a:t>5/10/2026</a:t>
             </a:fld>
             <a:endParaRPr lang="nl-BE"/>
           </a:p>
@@ -2288,7 +2288,7 @@
           <a:p>
             <a:fld id="{25D4C14B-8B81-49E7-9BC7-8AE29B5E2ADB}" type="datetimeFigureOut">
               <a:rPr lang="nl-BE" smtClean="0"/>
-              <a:t>2/10/2026</a:t>
+              <a:t>5/10/2026</a:t>
             </a:fld>
             <a:endParaRPr lang="nl-BE"/>
           </a:p>
@@ -2458,7 +2458,7 @@
           <a:p>
             <a:fld id="{25D4C14B-8B81-49E7-9BC7-8AE29B5E2ADB}" type="datetimeFigureOut">
               <a:rPr lang="nl-BE" smtClean="0"/>
-              <a:t>2/10/2026</a:t>
+              <a:t>5/10/2026</a:t>
             </a:fld>
             <a:endParaRPr lang="nl-BE"/>
           </a:p>
@@ -2704,7 +2704,7 @@
           <a:p>
             <a:fld id="{25D4C14B-8B81-49E7-9BC7-8AE29B5E2ADB}" type="datetimeFigureOut">
               <a:rPr lang="nl-BE" smtClean="0"/>
-              <a:t>2/10/2026</a:t>
+              <a:t>5/10/2026</a:t>
             </a:fld>
             <a:endParaRPr lang="nl-BE"/>
           </a:p>
@@ -2936,7 +2936,7 @@
           <a:p>
             <a:fld id="{25D4C14B-8B81-49E7-9BC7-8AE29B5E2ADB}" type="datetimeFigureOut">
               <a:rPr lang="nl-BE" smtClean="0"/>
-              <a:t>2/10/2026</a:t>
+              <a:t>5/10/2026</a:t>
             </a:fld>
             <a:endParaRPr lang="nl-BE"/>
           </a:p>
@@ -3303,7 +3303,7 @@
           <a:p>
             <a:fld id="{25D4C14B-8B81-49E7-9BC7-8AE29B5E2ADB}" type="datetimeFigureOut">
               <a:rPr lang="nl-BE" smtClean="0"/>
-              <a:t>2/10/2026</a:t>
+              <a:t>5/10/2026</a:t>
             </a:fld>
             <a:endParaRPr lang="nl-BE"/>
           </a:p>
@@ -3421,7 +3421,7 @@
           <a:p>
             <a:fld id="{25D4C14B-8B81-49E7-9BC7-8AE29B5E2ADB}" type="datetimeFigureOut">
               <a:rPr lang="nl-BE" smtClean="0"/>
-              <a:t>2/10/2026</a:t>
+              <a:t>5/10/2026</a:t>
             </a:fld>
             <a:endParaRPr lang="nl-BE"/>
           </a:p>
@@ -3516,7 +3516,7 @@
           <a:p>
             <a:fld id="{25D4C14B-8B81-49E7-9BC7-8AE29B5E2ADB}" type="datetimeFigureOut">
               <a:rPr lang="nl-BE" smtClean="0"/>
-              <a:t>2/10/2026</a:t>
+              <a:t>5/10/2026</a:t>
             </a:fld>
             <a:endParaRPr lang="nl-BE"/>
           </a:p>
@@ -3793,7 +3793,7 @@
           <a:p>
             <a:fld id="{25D4C14B-8B81-49E7-9BC7-8AE29B5E2ADB}" type="datetimeFigureOut">
               <a:rPr lang="nl-BE" smtClean="0"/>
-              <a:t>2/10/2026</a:t>
+              <a:t>5/10/2026</a:t>
             </a:fld>
             <a:endParaRPr lang="nl-BE"/>
           </a:p>
@@ -4046,7 +4046,7 @@
           <a:p>
             <a:fld id="{25D4C14B-8B81-49E7-9BC7-8AE29B5E2ADB}" type="datetimeFigureOut">
               <a:rPr lang="nl-BE" smtClean="0"/>
-              <a:t>2/10/2026</a:t>
+              <a:t>5/10/2026</a:t>
             </a:fld>
             <a:endParaRPr lang="nl-BE"/>
           </a:p>
@@ -4259,7 +4259,7 @@
           <a:p>
             <a:fld id="{25D4C14B-8B81-49E7-9BC7-8AE29B5E2ADB}" type="datetimeFigureOut">
               <a:rPr lang="nl-BE" smtClean="0"/>
-              <a:t>2/10/2026</a:t>
+              <a:t>5/10/2026</a:t>
             </a:fld>
             <a:endParaRPr lang="nl-BE"/>
           </a:p>
